--- a/提案資料/WineBank_新レートカード_3枚.pptx
+++ b/提案資料/WineBank_新レートカード_3枚.pptx
@@ -592,7 +592,7 @@
           <a:p>
             <a:r>
               <a:rPr lang="en-US" dirty="0"/>
-              <a:t>原価率の根拠：グループ直営飲食90%、ワインスクール80%、会員交流イベント・ワイナート年間購読50%、ワイン追加購入80%、CLUB年会費充当とオークション参加は内部振替のため0%。グランメゾンは交換レート0.5円×原価率90%。利用時の加重平均0.515円に利用率90%を掛けて発行1マイル原価0.464円。現金収支には保管・保険▲1.05%とオークション手数料+0.5%を織り込み済み。</a:t>
+              <a:t>1000万ティアの現金がゼロになる発行1マイル原価は 0.325円（現状 0.511円）。原価率の根拠：グループ直営飲食90%、ワインスクール80%、会員交流イベント・ワイナート年間購読50%、ワイン追加購入80%、WineBank CLUB年会費充当10%、オークション参加30%。グランメゾンは交換レート0.5円×原価率90%。利用時の加重平均0.568円に利用率90%を掛けて発行1マイル原価0.511円。現金収支には保管・保険▲1.05%とオークション手数料+0.5%を織り込み済み。</a:t>
             </a:r>
             <a:endParaRPr lang="en-US" dirty="0"/>
           </a:p>
@@ -3683,7 +3683,7 @@
                 <a:ea typeface="Meiryo" pitchFamily="34" charset="-122"/>
                 <a:cs typeface="Meiryo" pitchFamily="34" charset="-120"/>
               </a:rPr>
-              <a:t>交換先によって当社の原価はまったく違います。加重平均すると、額面1円あたりの当社負担は0.464円です。</a:t>
+              <a:t>交換先によって当社の原価はまったく違います。加重平均すると、額面1円あたりの当社負担は0.511円です。</a:t>
             </a:r>
             <a:endParaRPr lang="en-US" sz="1300" dirty="0"/>
           </a:p>
@@ -3756,7 +3756,7 @@
                 <a:gridCol w="1051560"/>
                 <a:gridCol w="1143000"/>
               </a:tblGrid>
-              <a:tr h="365760">
+              <a:tr h="347472">
                 <a:tc>
                   <a:txBody>
                     <a:bodyPr/>
@@ -4030,7 +4030,7 @@
                   </a:tcPr>
                 </a:tc>
               </a:tr>
-              <a:tr h="342900">
+              <a:tr h="315468">
                 <a:tc>
                   <a:txBody>
                     <a:bodyPr/>
@@ -4304,7 +4304,7 @@
                   </a:tcPr>
                 </a:tc>
               </a:tr>
-              <a:tr h="342900">
+              <a:tr h="315468">
                 <a:tc>
                   <a:txBody>
                     <a:bodyPr/>
@@ -4578,7 +4578,7 @@
                   </a:tcPr>
                 </a:tc>
               </a:tr>
-              <a:tr h="342900">
+              <a:tr h="315468">
                 <a:tc>
                   <a:txBody>
                     <a:bodyPr/>
@@ -4732,7 +4732,7 @@
                           <a:ea typeface="Meiryo" pitchFamily="34" charset="-122"/>
                           <a:cs typeface="Meiryo" pitchFamily="34" charset="-120"/>
                         </a:rPr>
-                        <a:t>0%</a:t>
+                        <a:t>10%</a:t>
                       </a:r>
                       <a:endParaRPr lang="en-US" sz="1050" dirty="0">
                         <a:latin typeface="Meiryo" charset="0"/>
@@ -4800,7 +4800,7 @@
                           <a:ea typeface="Meiryo" pitchFamily="34" charset="-122"/>
                           <a:cs typeface="Meiryo" pitchFamily="34" charset="-120"/>
                         </a:rPr>
-                        <a:t>0.000円</a:t>
+                        <a:t>0.100円</a:t>
                       </a:r>
                       <a:endParaRPr lang="en-US" sz="1100" dirty="0">
                         <a:latin typeface="Meiryo" charset="0"/>
@@ -4852,7 +4852,7 @@
                   </a:tcPr>
                 </a:tc>
               </a:tr>
-              <a:tr h="342900">
+              <a:tr h="315468">
                 <a:tc>
                   <a:txBody>
                     <a:bodyPr/>
@@ -5006,7 +5006,7 @@
                           <a:ea typeface="Meiryo" pitchFamily="34" charset="-122"/>
                           <a:cs typeface="Meiryo" pitchFamily="34" charset="-120"/>
                         </a:rPr>
-                        <a:t>0%</a:t>
+                        <a:t>30%</a:t>
                       </a:r>
                       <a:endParaRPr lang="en-US" sz="1050" dirty="0">
                         <a:latin typeface="Meiryo" charset="0"/>
@@ -5074,7 +5074,7 @@
                           <a:ea typeface="Meiryo" pitchFamily="34" charset="-122"/>
                           <a:cs typeface="Meiryo" pitchFamily="34" charset="-120"/>
                         </a:rPr>
-                        <a:t>0.000円</a:t>
+                        <a:t>0.300円</a:t>
                       </a:r>
                       <a:endParaRPr lang="en-US" sz="1100" dirty="0">
                         <a:latin typeface="Meiryo" charset="0"/>
@@ -5126,7 +5126,7 @@
                   </a:tcPr>
                 </a:tc>
               </a:tr>
-              <a:tr h="342900">
+              <a:tr h="315468">
                 <a:tc>
                   <a:txBody>
                     <a:bodyPr/>
@@ -5400,7 +5400,7 @@
                   </a:tcPr>
                 </a:tc>
               </a:tr>
-              <a:tr h="342900">
+              <a:tr h="315468">
                 <a:tc>
                   <a:txBody>
                     <a:bodyPr/>
@@ -5674,7 +5674,7 @@
                   </a:tcPr>
                 </a:tc>
               </a:tr>
-              <a:tr h="342900">
+              <a:tr h="315468">
                 <a:tc>
                   <a:txBody>
                     <a:bodyPr/>
@@ -5948,7 +5948,7 @@
                   </a:tcPr>
                 </a:tc>
               </a:tr>
-              <a:tr h="342900">
+              <a:tr h="315468">
                 <a:tc>
                   <a:txBody>
                     <a:bodyPr/>
@@ -6222,7 +6222,7 @@
                   </a:tcPr>
                 </a:tc>
               </a:tr>
-              <a:tr h="384048">
+              <a:tr h="365760">
                 <a:tc>
                   <a:txBody>
                     <a:bodyPr/>
@@ -6444,7 +6444,7 @@
                           <a:ea typeface="Meiryo" pitchFamily="34" charset="-122"/>
                           <a:cs typeface="Meiryo" pitchFamily="34" charset="-120"/>
                         </a:rPr>
-                        <a:t>0.515円</a:t>
+                        <a:t>0.568円</a:t>
                       </a:r>
                       <a:endParaRPr lang="en-US" sz="1150" dirty="0">
                         <a:latin typeface="Meiryo" charset="0"/>
@@ -6508,12 +6508,12 @@
         </p:nvSpPr>
         <p:spPr>
           <a:xfrm>
-            <a:off x="566928" y="5248656"/>
-            <a:ext cx="5394960" cy="786384"/>
+            <a:off x="566928" y="4974336"/>
+            <a:ext cx="5394960" cy="658368"/>
           </a:xfrm>
           <a:prstGeom prst="roundRect">
             <a:avLst>
-              <a:gd name="adj" fmla="val 6977"/>
+              <a:gd name="adj" fmla="val 8333"/>
             </a:avLst>
           </a:prstGeom>
           <a:solidFill>
@@ -6542,8 +6542,8 @@
         </p:nvSpPr>
         <p:spPr>
           <a:xfrm>
-            <a:off x="932688" y="5376672"/>
-            <a:ext cx="4663440" cy="292608"/>
+            <a:off x="932688" y="5047488"/>
+            <a:ext cx="4663440" cy="274320"/>
           </a:xfrm>
           <a:prstGeom prst="rect">
             <a:avLst/>
@@ -6559,7 +6559,7 @@
               <a:buNone/>
             </a:pPr>
             <a:r>
-              <a:rPr lang="en-US" sz="1400" b="1" dirty="0">
+              <a:rPr lang="en-US" sz="1350" b="1" dirty="0">
                 <a:solidFill>
                   <a:srgbClr val="E8CE78"/>
                 </a:solidFill>
@@ -6567,9 +6567,9 @@
                 <a:ea typeface="Meiryo" pitchFamily="34" charset="-122"/>
                 <a:cs typeface="Meiryo" pitchFamily="34" charset="-120"/>
               </a:rPr>
-              <a:t>利用率90%を掛けて、発行1マイル原価は 0.464円</a:t>
+              <a:t>利用率90%を掛けて、発行1マイル原価は 0.511円</a:t>
             </a:r>
-            <a:endParaRPr lang="en-US" sz="1400" dirty="0"/>
+            <a:endParaRPr lang="en-US" sz="1350" dirty="0"/>
           </a:p>
         </p:txBody>
       </p:sp>
@@ -6581,8 +6581,8 @@
         </p:nvSpPr>
         <p:spPr>
           <a:xfrm>
-            <a:off x="932688" y="5687568"/>
-            <a:ext cx="4663440" cy="237744"/>
+            <a:off x="932688" y="5321808"/>
+            <a:ext cx="4663440" cy="219456"/>
           </a:xfrm>
           <a:prstGeom prst="rect">
             <a:avLst/>
@@ -6598,7 +6598,7 @@
               <a:buNone/>
             </a:pPr>
             <a:r>
-              <a:rPr lang="en-US" sz="1050" dirty="0">
+              <a:rPr lang="en-US" sz="1000" dirty="0">
                 <a:solidFill>
                   <a:srgbClr val="F2EDE6"/>
                 </a:solidFill>
@@ -6608,7 +6608,7 @@
               </a:rPr>
               <a:t>残る10%は有効期限切れ。失効益はあてにしない保守的な置き方です。</a:t>
             </a:r>
-            <a:endParaRPr lang="en-US" sz="1050" dirty="0"/>
+            <a:endParaRPr lang="en-US" sz="1000" dirty="0"/>
           </a:p>
         </p:txBody>
       </p:sp>
@@ -7137,7 +7137,7 @@
                           <a:ea typeface="Meiryo" pitchFamily="34" charset="-122"/>
                           <a:cs typeface="Meiryo" pitchFamily="34" charset="-120"/>
                         </a:rPr>
-                        <a:t>▲18,540</a:t>
+                        <a:t>▲20,455</a:t>
                       </a:r>
                       <a:endParaRPr lang="en-US" sz="1050" dirty="0">
                         <a:latin typeface="Meiryo" charset="0"/>
@@ -7205,7 +7205,7 @@
                           <a:ea typeface="Meiryo" pitchFamily="34" charset="-122"/>
                           <a:cs typeface="Meiryo" pitchFamily="34" charset="-120"/>
                         </a:rPr>
-                        <a:t>+3,460</a:t>
+                        <a:t>+1,545</a:t>
                       </a:r>
                       <a:endParaRPr lang="en-US" sz="1050" dirty="0">
                         <a:latin typeface="Meiryo" charset="0"/>
@@ -7273,7 +7273,7 @@
                           <a:ea typeface="Meiryo" pitchFamily="34" charset="-122"/>
                           <a:cs typeface="Meiryo" pitchFamily="34" charset="-120"/>
                         </a:rPr>
-                        <a:t>+21,460</a:t>
+                        <a:t>+19,545</a:t>
                       </a:r>
                       <a:endParaRPr lang="en-US" sz="1050" dirty="0">
                         <a:latin typeface="Meiryo" charset="0"/>
@@ -7479,7 +7479,7 @@
                           <a:ea typeface="Meiryo" pitchFamily="34" charset="-122"/>
                           <a:cs typeface="Meiryo" pitchFamily="34" charset="-120"/>
                         </a:rPr>
-                        <a:t>▲115,875</a:t>
+                        <a:t>▲127,845</a:t>
                       </a:r>
                       <a:endParaRPr lang="en-US" sz="1050" dirty="0">
                         <a:latin typeface="Meiryo" charset="0"/>
@@ -7547,7 +7547,7 @@
                           <a:ea typeface="Meiryo" pitchFamily="34" charset="-122"/>
                           <a:cs typeface="Meiryo" pitchFamily="34" charset="-120"/>
                         </a:rPr>
-                        <a:t>▲13,375</a:t>
+                        <a:t>▲25,345</a:t>
                       </a:r>
                       <a:endParaRPr lang="en-US" sz="1050" dirty="0">
                         <a:latin typeface="Meiryo" charset="0"/>
@@ -7615,7 +7615,7 @@
                           <a:ea typeface="Meiryo" pitchFamily="34" charset="-122"/>
                           <a:cs typeface="Meiryo" pitchFamily="34" charset="-120"/>
                         </a:rPr>
-                        <a:t>+69,125</a:t>
+                        <a:t>+57,155</a:t>
                       </a:r>
                       <a:endParaRPr lang="en-US" sz="1050" dirty="0">
                         <a:latin typeface="Meiryo" charset="0"/>
@@ -7821,7 +7821,7 @@
                           <a:ea typeface="Meiryo" pitchFamily="34" charset="-122"/>
                           <a:cs typeface="Meiryo" pitchFamily="34" charset="-120"/>
                         </a:rPr>
-                        <a:t>▲278,100</a:t>
+                        <a:t>▲306,828</a:t>
                       </a:r>
                       <a:endParaRPr lang="en-US" sz="1050" dirty="0">
                         <a:latin typeface="Meiryo" charset="0"/>
@@ -7889,7 +7889,7 @@
                           <a:ea typeface="Meiryo" pitchFamily="34" charset="-122"/>
                           <a:cs typeface="Meiryo" pitchFamily="34" charset="-120"/>
                         </a:rPr>
-                        <a:t>▲83,100</a:t>
+                        <a:t>▲111,828</a:t>
                       </a:r>
                       <a:endParaRPr lang="en-US" sz="1050" dirty="0">
                         <a:latin typeface="Meiryo" charset="0"/>
@@ -7957,7 +7957,7 @@
                           <a:ea typeface="Meiryo" pitchFamily="34" charset="-122"/>
                           <a:cs typeface="Meiryo" pitchFamily="34" charset="-120"/>
                         </a:rPr>
-                        <a:t>+66,900</a:t>
+                        <a:t>+38,172</a:t>
                       </a:r>
                       <a:endParaRPr lang="en-US" sz="1050" dirty="0">
                         <a:latin typeface="Meiryo" charset="0"/>
@@ -8022,11 +8022,11 @@
         <p:spPr>
           <a:xfrm>
             <a:off x="6199632" y="3401568"/>
-            <a:ext cx="5394960" cy="1078992"/>
+            <a:ext cx="5394960" cy="1005840"/>
           </a:xfrm>
           <a:prstGeom prst="roundRect">
             <a:avLst>
-              <a:gd name="adj" fmla="val 5085"/>
+              <a:gd name="adj" fmla="val 5455"/>
             </a:avLst>
           </a:prstGeom>
           <a:solidFill>
@@ -8392,7 +8392,7 @@
                 <a:ea typeface="Meiryo" pitchFamily="34" charset="-122"/>
                 <a:cs typeface="Meiryo" pitchFamily="34" charset="-120"/>
               </a:rPr>
-              <a:t>▲216</a:t>
+              <a:t>▲238</a:t>
             </a:r>
             <a:endParaRPr lang="en-US" sz="1400" dirty="0"/>
           </a:p>
@@ -8470,7 +8470,7 @@
                 <a:ea typeface="Meiryo" pitchFamily="34" charset="-122"/>
                 <a:cs typeface="Meiryo" pitchFamily="34" charset="-120"/>
               </a:rPr>
-              <a:t>166</a:t>
+              <a:t>144</a:t>
             </a:r>
             <a:endParaRPr lang="en-US" sz="1400" dirty="0"/>
           </a:p>
@@ -8484,12 +8484,12 @@
         </p:nvSpPr>
         <p:spPr>
           <a:xfrm>
-            <a:off x="6199632" y="4608576"/>
-            <a:ext cx="5394960" cy="1426464"/>
+            <a:off x="6199632" y="4517136"/>
+            <a:ext cx="5394960" cy="1133856"/>
           </a:xfrm>
           <a:prstGeom prst="roundRect">
             <a:avLst>
-              <a:gd name="adj" fmla="val 3846"/>
+              <a:gd name="adj" fmla="val 4839"/>
             </a:avLst>
           </a:prstGeom>
           <a:solidFill>
@@ -8518,8 +8518,8 @@
         </p:nvSpPr>
         <p:spPr>
           <a:xfrm>
-            <a:off x="6565392" y="4809744"/>
-            <a:ext cx="4663440" cy="292608"/>
+            <a:off x="6565392" y="4681728"/>
+            <a:ext cx="4663440" cy="274320"/>
           </a:xfrm>
           <a:prstGeom prst="rect">
             <a:avLst/>
@@ -8535,7 +8535,7 @@
               <a:buNone/>
             </a:pPr>
             <a:r>
-              <a:rPr lang="en-US" sz="1450" b="1" dirty="0">
+              <a:rPr lang="en-US" sz="1400" b="1" dirty="0">
                 <a:solidFill>
                   <a:srgbClr val="E8CE78"/>
                 </a:solidFill>
@@ -8545,7 +8545,7 @@
               </a:rPr>
               <a:t>上位ほど、当社の現金収支は薄くなります</a:t>
             </a:r>
-            <a:endParaRPr lang="en-US" sz="1450" dirty="0"/>
+            <a:endParaRPr lang="en-US" sz="1400" dirty="0"/>
           </a:p>
         </p:txBody>
       </p:sp>
@@ -8557,8 +8557,8 @@
         </p:nvSpPr>
         <p:spPr>
           <a:xfrm>
-            <a:off x="6565392" y="5157216"/>
-            <a:ext cx="4663440" cy="786384"/>
+            <a:off x="6565392" y="4992624"/>
+            <a:ext cx="4663440" cy="566928"/>
           </a:xfrm>
           <a:prstGeom prst="rect">
             <a:avLst/>
@@ -8572,12 +8572,12 @@
           <a:p>
             <a:pPr indent="0" marL="0">
               <a:lnSpc>
-                <a:spcPts val="1600"/>
+                <a:spcPts val="1500"/>
               </a:lnSpc>
               <a:buNone/>
             </a:pPr>
             <a:r>
-              <a:rPr lang="en-US" sz="1100" dirty="0">
+              <a:rPr lang="en-US" sz="1050" dirty="0">
                 <a:solidFill>
                   <a:srgbClr val="A2908C"/>
                 </a:solidFill>
@@ -8585,9 +8585,71 @@
                 <a:ea typeface="Meiryo" pitchFamily="34" charset="-122"/>
                 <a:cs typeface="Meiryo" pitchFamily="34" charset="-120"/>
               </a:rPr>
-              <a:t>管理料は2.50〜2.75%とほぼ一定なのに、マイル還元は4%→6%へ上がるためです。1000万は現金で年83,100円の持ち出しとなり、プロフィットシェア150,000円で回収する設計。ストック単体で黒字化させるには、発行1マイル原価を0.400円まで下げる必要があります。</a:t>
+              <a:t>管理料は2.50〜2.75%とほぼ一定なのに、マイル還元は4%→6%へ上がるためです。1000万は現金で年111,828円の持ち出しとなり、プロフィットシェア150,000円で回収する設計です。</a:t>
             </a:r>
-            <a:endParaRPr lang="en-US" sz="1100" dirty="0"/>
+            <a:endParaRPr lang="en-US" sz="1050" dirty="0"/>
+          </a:p>
+        </p:txBody>
+      </p:sp>
+      <p:sp>
+        <p:nvSpPr>
+          <p:cNvPr id="26" name="Text 22"/>
+          <p:cNvSpPr txBox="1"/>
+          <p:nvPr/>
+        </p:nvSpPr>
+        <p:spPr>
+          <a:xfrm>
+            <a:off x="566928" y="5724144"/>
+            <a:ext cx="11027664" cy="329184"/>
+          </a:xfrm>
+          <a:prstGeom prst="rect">
+            <a:avLst/>
+          </a:prstGeom>
+          <a:noFill/>
+          <a:ln/>
+        </p:spPr>
+        <p:txBody>
+          <a:bodyPr wrap="square" lIns="0" tIns="0" rIns="0" bIns="0" rtlCol="0" anchor="ctr"/>
+          <a:lstStyle/>
+          <a:p>
+            <a:pPr indent="0" marL="0">
+              <a:lnSpc>
+                <a:spcPts val="1200"/>
+              </a:lnSpc>
+              <a:buNone/>
+            </a:pPr>
+            <a:r>
+              <a:rPr lang="en-US" sz="850" dirty="0">
+                <a:solidFill>
+                  <a:srgbClr val="6B5A5F"/>
+                </a:solidFill>
+                <a:latin typeface="Meiryo" pitchFamily="34" charset="0"/>
+                <a:ea typeface="Meiryo" pitchFamily="34" charset="-122"/>
+                <a:cs typeface="Meiryo" pitchFamily="34" charset="-120"/>
+              </a:rPr>
+              <a:t>※ 現金収支 ＝ 管理手数料 − 保管・保険料（預かり資産×1.05%・鈴与実額210円/本） ＋ オークション手数料（同×0.5%＝回転10%×当社ルート50%×買い手10%） − マイル費用（マイル額面×0.511円）</a:t>
+            </a:r>
+            <a:endParaRPr lang="en-US" sz="850" dirty="0"/>
+          </a:p>
+          <a:p>
+            <a:pPr indent="0" marL="0">
+              <a:lnSpc>
+                <a:spcPts val="1200"/>
+              </a:lnSpc>
+              <a:buNone/>
+            </a:pPr>
+            <a:r>
+              <a:rPr lang="en-US" sz="850" dirty="0">
+                <a:solidFill>
+                  <a:srgbClr val="6B5A5F"/>
+                </a:solidFill>
+                <a:latin typeface="Meiryo" pitchFamily="34" charset="0"/>
+                <a:ea typeface="Meiryo" pitchFamily="34" charset="-122"/>
+                <a:cs typeface="Meiryo" pitchFamily="34" charset="-120"/>
+              </a:rPr>
+              <a:t>　 経済収支 ＝ 現金収支 ＋ プロフィットシェア（預かり資産×値上がり6%×当社シェア率）。PSは契約終了時に精算する発生額で、現金化していません。</a:t>
+            </a:r>
+            <a:endParaRPr lang="en-US" sz="850" dirty="0"/>
           </a:p>
         </p:txBody>
       </p:sp>
@@ -9857,7 +9919,7 @@
                           <a:ea typeface="Meiryo" pitchFamily="34" charset="-122"/>
                           <a:cs typeface="Meiryo" pitchFamily="34" charset="-120"/>
                         </a:rPr>
-                        <a:t>▲216</a:t>
+                        <a:t>▲238</a:t>
                       </a:r>
                       <a:endParaRPr lang="en-US" sz="1100" dirty="0">
                         <a:latin typeface="Meiryo" charset="0"/>
@@ -10133,7 +10195,7 @@
                           <a:ea typeface="Meiryo" pitchFamily="34" charset="-122"/>
                           <a:cs typeface="Meiryo" pitchFamily="34" charset="-120"/>
                         </a:rPr>
-                        <a:t>2,996</a:t>
+                        <a:t>2,973</a:t>
                       </a:r>
                       <a:endParaRPr lang="en-US" sz="1250" dirty="0">
                         <a:latin typeface="Meiryo" charset="0"/>
@@ -10409,7 +10471,7 @@
                           <a:ea typeface="Meiryo" pitchFamily="34" charset="-122"/>
                           <a:cs typeface="Meiryo" pitchFamily="34" charset="-120"/>
                         </a:rPr>
-                        <a:t>3,166</a:t>
+                        <a:t>3,144</a:t>
                       </a:r>
                       <a:endParaRPr lang="en-US" sz="1250" dirty="0">
                         <a:latin typeface="Meiryo" charset="0"/>
@@ -10844,7 +10906,7 @@
                 <a:ea typeface="Meiryo" pitchFamily="34" charset="-122"/>
                 <a:cs typeface="Meiryo" pitchFamily="34" charset="-120"/>
               </a:rPr>
-              <a:t>▲216</a:t>
+              <a:t>▲238</a:t>
             </a:r>
             <a:endParaRPr lang="en-US" sz="1100" dirty="0"/>
           </a:p>
@@ -10883,7 +10945,7 @@
                 <a:ea typeface="Meiryo" pitchFamily="34" charset="-122"/>
                 <a:cs typeface="Meiryo" pitchFamily="34" charset="-120"/>
               </a:rPr>
-              <a:t>現金 ▲4 万円</a:t>
+              <a:t>現金 ▲27 万円</a:t>
             </a:r>
             <a:endParaRPr lang="en-US" sz="1400" dirty="0"/>
           </a:p>
@@ -10961,7 +11023,7 @@
                 <a:ea typeface="Meiryo" pitchFamily="34" charset="-122"/>
                 <a:cs typeface="Meiryo" pitchFamily="34" charset="-120"/>
               </a:rPr>
-              <a:t>経済 166 万円</a:t>
+              <a:t>経済 144 万円</a:t>
             </a:r>
             <a:endParaRPr lang="en-US" sz="1400" dirty="0"/>
           </a:p>
@@ -11263,7 +11325,7 @@
                 <a:ea typeface="Meiryo" pitchFamily="34" charset="-122"/>
                 <a:cs typeface="Meiryo" pitchFamily="34" charset="-120"/>
               </a:rPr>
-              <a:t>会員は年110〜540万円、当社は初年度3,166万円。両方が取れています。</a:t>
+              <a:t>会員は年110〜540万円、当社は初年度3,144万円。両方が取れています。</a:t>
             </a:r>
             <a:endParaRPr lang="en-US" sz="1700" dirty="0"/>
           </a:p>
@@ -11302,7 +11364,7 @@
                 <a:ea typeface="Meiryo" pitchFamily="34" charset="-122"/>
                 <a:cs typeface="Meiryo" pitchFamily="34" charset="-120"/>
               </a:rPr>
-              <a:t>ただし2年目以降の現金は▲4万円。利益はワイン販売の粗利とプロフィットシェアに乗っています。</a:t>
+              <a:t>ただし2年目以降の現金は▲27万円。利益はワイン販売の粗利とプロフィットシェアに乗っています。</a:t>
             </a:r>
             <a:endParaRPr lang="en-US" sz="1150" dirty="0"/>
           </a:p>
